--- a/reports/final/Rhodes - Historical Unemployment in the United States.pptx
+++ b/reports/final/Rhodes - Historical Unemployment in the United States.pptx
@@ -6,7 +6,7 @@
     <p:sldMasterId id="2147483821" r:id="rId5"/>
   </p:sldMasterIdLst>
   <p:notesMasterIdLst>
-    <p:notesMasterId r:id="rId20"/>
+    <p:notesMasterId r:id="rId21"/>
   </p:notesMasterIdLst>
   <p:sldIdLst>
     <p:sldId id="256" r:id="rId6"/>
@@ -16,13 +16,14 @@
     <p:sldId id="260" r:id="rId10"/>
     <p:sldId id="261" r:id="rId11"/>
     <p:sldId id="262" r:id="rId12"/>
-    <p:sldId id="263" r:id="rId13"/>
-    <p:sldId id="264" r:id="rId14"/>
-    <p:sldId id="266" r:id="rId15"/>
-    <p:sldId id="267" r:id="rId16"/>
-    <p:sldId id="268" r:id="rId17"/>
-    <p:sldId id="269" r:id="rId18"/>
-    <p:sldId id="270" r:id="rId19"/>
+    <p:sldId id="271" r:id="rId13"/>
+    <p:sldId id="272" r:id="rId14"/>
+    <p:sldId id="263" r:id="rId15"/>
+    <p:sldId id="266" r:id="rId16"/>
+    <p:sldId id="267" r:id="rId17"/>
+    <p:sldId id="268" r:id="rId18"/>
+    <p:sldId id="269" r:id="rId19"/>
+    <p:sldId id="270" r:id="rId20"/>
   </p:sldIdLst>
   <p:sldSz cx="12192000" cy="6858000"/>
   <p:notesSz cx="6858000" cy="9144000"/>
@@ -4764,7 +4765,7 @@
             </a:lnSpc>
           </a:pPr>
           <a:r>
-            <a:rPr lang="en-US"/>
+            <a:rPr lang="en-US" dirty="0"/>
             <a:t>Unemployment defines economic standings, regional inequality, demographic patterns, migration patterns, etc.</a:t>
           </a:r>
         </a:p>
@@ -7252,7 +7253,7 @@
             <a:buNone/>
           </a:pPr>
           <a:r>
-            <a:rPr lang="en-US" sz="2200" kern="1200"/>
+            <a:rPr lang="en-US" sz="2200" kern="1200" dirty="0"/>
             <a:t>Unemployment defines economic standings, regional inequality, demographic patterns, migration patterns, etc.</a:t>
           </a:r>
         </a:p>
@@ -19189,7 +19190,7 @@
           <a:p>
             <a:fld id="{3FCEC2B7-5603-E847-9CCD-B17BCD70217C}" type="datetimeFigureOut">
               <a:rPr lang="en-US" smtClean="0"/>
-              <a:t>5/12/2026</a:t>
+              <a:t>5/13/2026</a:t>
             </a:fld>
             <a:endParaRPr lang="en-US"/>
           </a:p>
@@ -19668,7 +19669,7 @@
           <a:p>
             <a:fld id="{C6B4DC52-CC44-D647-BBB1-762854F46572}" type="datetime1">
               <a:rPr lang="en-US" smtClean="0"/>
-              <a:t>5/12/2026</a:t>
+              <a:t>5/13/2026</a:t>
             </a:fld>
             <a:endParaRPr lang="en-US" dirty="0"/>
           </a:p>
@@ -20000,7 +20001,7 @@
           <a:p>
             <a:fld id="{D4F4F1D5-6C74-2344-B02C-988BD7DE5058}" type="datetime1">
               <a:rPr lang="en-US" smtClean="0"/>
-              <a:t>5/12/2026</a:t>
+              <a:t>5/13/2026</a:t>
             </a:fld>
             <a:endParaRPr lang="en-US"/>
           </a:p>
@@ -20399,7 +20400,7 @@
           <a:p>
             <a:fld id="{DF926B5E-0855-9440-AA3D-7D15E0A5A0A9}" type="datetime1">
               <a:rPr lang="en-US" smtClean="0"/>
-              <a:t>5/12/2026</a:t>
+              <a:t>5/13/2026</a:t>
             </a:fld>
             <a:endParaRPr lang="en-US"/>
           </a:p>
@@ -20861,7 +20862,7 @@
           <a:p>
             <a:fld id="{20EA976F-543A-3147-8F10-92D90F1FB7DE}" type="datetime1">
               <a:rPr lang="en-US" smtClean="0"/>
-              <a:t>5/12/2026</a:t>
+              <a:t>5/13/2026</a:t>
             </a:fld>
             <a:endParaRPr lang="en-US"/>
           </a:p>
@@ -21135,7 +21136,7 @@
           <a:p>
             <a:fld id="{6B262A3C-8A73-964C-A7B1-9C66EB8F456D}" type="datetime1">
               <a:rPr lang="en-US" smtClean="0"/>
-              <a:t>5/12/2026</a:t>
+              <a:t>5/13/2026</a:t>
             </a:fld>
             <a:endParaRPr lang="en-US"/>
           </a:p>
@@ -21466,7 +21467,7 @@
           <a:p>
             <a:fld id="{16BEDD57-7FB0-8C49-978A-2E5AD4193CAB}" type="datetime1">
               <a:rPr lang="en-US" smtClean="0"/>
-              <a:t>5/12/2026</a:t>
+              <a:t>5/13/2026</a:t>
             </a:fld>
             <a:endParaRPr lang="en-US"/>
           </a:p>
@@ -21801,7 +21802,7 @@
           <a:p>
             <a:fld id="{3398BDEE-7079-9E46-9D3D-C026D74D657A}" type="datetime1">
               <a:rPr lang="en-US" smtClean="0"/>
-              <a:t>5/12/2026</a:t>
+              <a:t>5/13/2026</a:t>
             </a:fld>
             <a:endParaRPr lang="en-US"/>
           </a:p>
@@ -22138,7 +22139,7 @@
           <a:p>
             <a:fld id="{1B7DA1B6-7262-A14C-9D8B-572C17D5CCAA}" type="datetime1">
               <a:rPr lang="en-US" smtClean="0"/>
-              <a:t>5/12/2026</a:t>
+              <a:t>5/13/2026</a:t>
             </a:fld>
             <a:endParaRPr lang="en-US"/>
           </a:p>
@@ -22391,7 +22392,7 @@
           <a:p>
             <a:fld id="{398B914E-727D-924F-AF8C-57D7CD572093}" type="datetime1">
               <a:rPr lang="en-US" smtClean="0"/>
-              <a:t>5/12/2026</a:t>
+              <a:t>5/13/2026</a:t>
             </a:fld>
             <a:endParaRPr lang="en-US"/>
           </a:p>
@@ -22645,7 +22646,7 @@
           <a:p>
             <a:fld id="{F70565B3-CF1A-E942-97FF-0B9F398F7855}" type="datetime1">
               <a:rPr lang="en-US" smtClean="0"/>
-              <a:t>5/12/2026</a:t>
+              <a:t>5/13/2026</a:t>
             </a:fld>
             <a:endParaRPr lang="en-US"/>
           </a:p>
@@ -22977,7 +22978,7 @@
           <a:p>
             <a:fld id="{F048A344-177D-9B4D-B4B5-DB629B3B0E97}" type="datetime1">
               <a:rPr lang="en-US" smtClean="0"/>
-              <a:t>5/12/2026</a:t>
+              <a:t>5/13/2026</a:t>
             </a:fld>
             <a:endParaRPr lang="en-US"/>
           </a:p>
@@ -23283,7 +23284,7 @@
           <a:p>
             <a:fld id="{CF2CF59F-16CF-294B-89B0-023DBFDF062C}" type="datetime1">
               <a:rPr lang="en-US" smtClean="0"/>
-              <a:t>5/12/2026</a:t>
+              <a:t>5/13/2026</a:t>
             </a:fld>
             <a:endParaRPr lang="en-US"/>
           </a:p>
@@ -23542,7 +23543,7 @@
           <a:p>
             <a:fld id="{5A7A0291-FBD7-2345-9C81-5FC586A6DB9E}" type="datetime1">
               <a:rPr lang="en-US" smtClean="0"/>
-              <a:t>5/12/2026</a:t>
+              <a:t>5/13/2026</a:t>
             </a:fld>
             <a:endParaRPr lang="en-US"/>
           </a:p>
@@ -23760,7 +23761,7 @@
           <a:p>
             <a:fld id="{32AD6C8C-4A02-004B-93D7-C0DBD4026299}" type="datetime1">
               <a:rPr lang="en-US" smtClean="0"/>
-              <a:t>5/12/2026</a:t>
+              <a:t>5/13/2026</a:t>
             </a:fld>
             <a:endParaRPr lang="en-US"/>
           </a:p>
@@ -24209,7 +24210,7 @@
           <a:p>
             <a:fld id="{954F3EE5-5A62-1142-B29B-2D79B0DFBB49}" type="datetime1">
               <a:rPr lang="en-US" smtClean="0"/>
-              <a:t>5/12/2026</a:t>
+              <a:t>5/13/2026</a:t>
             </a:fld>
             <a:endParaRPr lang="en-US"/>
           </a:p>
@@ -24522,7 +24523,7 @@
           <a:p>
             <a:fld id="{72C7549D-B911-DC4D-9096-0244F27A5122}" type="datetime1">
               <a:rPr lang="en-US" smtClean="0"/>
-              <a:t>5/12/2026</a:t>
+              <a:t>5/13/2026</a:t>
             </a:fld>
             <a:endParaRPr lang="en-US"/>
           </a:p>
@@ -24967,7 +24968,7 @@
           <a:p>
             <a:fld id="{FE3B3F6E-3994-0241-BCBC-BC1EBD257F6E}" type="datetime1">
               <a:rPr lang="en-US" smtClean="0"/>
-              <a:t>5/12/2026</a:t>
+              <a:t>5/13/2026</a:t>
             </a:fld>
             <a:endParaRPr lang="en-US"/>
           </a:p>
@@ -25383,7 +25384,7 @@
           <a:p>
             <a:fld id="{CEBAFC1B-AD29-C14A-91E0-0745420D0140}" type="datetime1">
               <a:rPr lang="en-US" smtClean="0"/>
-              <a:t>5/12/2026</a:t>
+              <a:t>5/13/2026</a:t>
             </a:fld>
             <a:endParaRPr lang="en-US"/>
           </a:p>
@@ -25673,7 +25674,7 @@
           <a:p>
             <a:fld id="{BCA30940-2954-AA4F-9BFF-1013B5D668D8}" type="datetime1">
               <a:rPr lang="en-US" smtClean="0"/>
-              <a:t>5/12/2026</a:t>
+              <a:t>5/13/2026</a:t>
             </a:fld>
             <a:endParaRPr lang="en-US"/>
           </a:p>
@@ -26062,7 +26063,7 @@
           <a:p>
             <a:fld id="{5A0B49E7-1C5B-AD4A-B8C0-4550FE0A0235}" type="datetime1">
               <a:rPr lang="en-US" smtClean="0"/>
-              <a:t>5/12/2026</a:t>
+              <a:t>5/13/2026</a:t>
             </a:fld>
             <a:endParaRPr lang="en-US"/>
           </a:p>
@@ -26352,7 +26353,7 @@
           <a:p>
             <a:fld id="{948C343A-B82F-4143-9348-1F135B2BF1BF}" type="datetime1">
               <a:rPr lang="en-US" smtClean="0"/>
-              <a:t>5/12/2026</a:t>
+              <a:t>5/13/2026</a:t>
             </a:fld>
             <a:endParaRPr lang="en-US"/>
           </a:p>
@@ -26748,7 +26749,7 @@
           <a:p>
             <a:fld id="{CE92A1C8-408E-D74D-B08B-E4740ED27994}" type="datetime1">
               <a:rPr lang="en-US" smtClean="0"/>
-              <a:t>5/12/2026</a:t>
+              <a:t>5/13/2026</a:t>
             </a:fld>
             <a:endParaRPr lang="en-US"/>
           </a:p>
@@ -27052,7 +27053,7 @@
           <a:p>
             <a:fld id="{CE2FA9DB-1C23-8847-8157-4FA9725CC381}" type="datetime1">
               <a:rPr lang="en-US" smtClean="0"/>
-              <a:t>5/12/2026</a:t>
+              <a:t>5/13/2026</a:t>
             </a:fld>
             <a:endParaRPr lang="en-US"/>
           </a:p>
@@ -27301,7 +27302,7 @@
           <a:p>
             <a:fld id="{74C1E1D0-99FC-0441-BDC2-0A5DDB99B607}" type="datetime1">
               <a:rPr lang="en-US" smtClean="0"/>
-              <a:t>5/12/2026</a:t>
+              <a:t>5/13/2026</a:t>
             </a:fld>
             <a:endParaRPr lang="en-US"/>
           </a:p>
@@ -27866,7 +27867,7 @@
           <a:p>
             <a:fld id="{4D2F5157-4209-D142-B123-F174FB18FA7D}" type="datetime1">
               <a:rPr lang="en-US" smtClean="0"/>
-              <a:t>5/12/2026</a:t>
+              <a:t>5/13/2026</a:t>
             </a:fld>
             <a:endParaRPr lang="en-US"/>
           </a:p>
@@ -28151,7 +28152,7 @@
           <a:p>
             <a:fld id="{D4039460-34D4-104F-A87D-31820CDD6266}" type="datetime1">
               <a:rPr lang="en-US" smtClean="0"/>
-              <a:t>5/12/2026</a:t>
+              <a:t>5/13/2026</a:t>
             </a:fld>
             <a:endParaRPr lang="en-US"/>
           </a:p>
@@ -28434,7 +28435,7 @@
           <a:p>
             <a:fld id="{1134199F-B77C-624E-8596-34C330D06B24}" type="datetime1">
               <a:rPr lang="en-US" smtClean="0"/>
-              <a:t>5/12/2026</a:t>
+              <a:t>5/13/2026</a:t>
             </a:fld>
             <a:endParaRPr lang="en-US"/>
           </a:p>
@@ -28854,7 +28855,7 @@
           <a:p>
             <a:fld id="{46D95950-DF64-8142-88A4-F8F59685720D}" type="datetime1">
               <a:rPr lang="en-US" smtClean="0"/>
-              <a:t>5/12/2026</a:t>
+              <a:t>5/13/2026</a:t>
             </a:fld>
             <a:endParaRPr lang="en-US"/>
           </a:p>
@@ -29219,7 +29220,7 @@
           <a:p>
             <a:fld id="{05030E4E-627B-D64F-876E-5B4D0895463B}" type="datetime1">
               <a:rPr lang="en-US" smtClean="0"/>
-              <a:t>5/12/2026</a:t>
+              <a:t>5/13/2026</a:t>
             </a:fld>
             <a:endParaRPr lang="en-US"/>
           </a:p>
@@ -29568,7 +29569,7 @@
           <a:p>
             <a:fld id="{3EB7EF76-FB1E-EA44-B271-29D75F3FBB25}" type="datetime1">
               <a:rPr lang="en-US" smtClean="0"/>
-              <a:t>5/12/2026</a:t>
+              <a:t>5/13/2026</a:t>
             </a:fld>
             <a:endParaRPr lang="en-US"/>
           </a:p>
@@ -29791,7 +29792,7 @@
           <a:p>
             <a:fld id="{45042452-74AC-7E41-8CDA-7073C00E876C}" type="datetime1">
               <a:rPr lang="en-US" smtClean="0"/>
-              <a:t>5/12/2026</a:t>
+              <a:t>5/13/2026</a:t>
             </a:fld>
             <a:endParaRPr lang="en-US"/>
           </a:p>
@@ -30102,7 +30103,7 @@
           <a:p>
             <a:fld id="{822D6359-BBC3-9E40-B171-C99E9F4933E9}" type="datetime1">
               <a:rPr lang="en-US" smtClean="0"/>
-              <a:t>5/12/2026</a:t>
+              <a:t>5/13/2026</a:t>
             </a:fld>
             <a:endParaRPr lang="en-US"/>
           </a:p>
@@ -30366,7 +30367,7 @@
           <a:p>
             <a:fld id="{F06BEBE4-268E-1643-A712-CC93702C9C05}" type="datetime1">
               <a:rPr lang="en-US" smtClean="0"/>
-              <a:t>5/12/2026</a:t>
+              <a:t>5/13/2026</a:t>
             </a:fld>
             <a:endParaRPr lang="en-US"/>
           </a:p>
@@ -30628,7 +30629,7 @@
           <a:p>
             <a:fld id="{84E3F07D-7317-3440-A531-3AA29DD45979}" type="datetime1">
               <a:rPr lang="en-US" smtClean="0"/>
-              <a:t>5/12/2026</a:t>
+              <a:t>5/13/2026</a:t>
             </a:fld>
             <a:endParaRPr lang="en-US"/>
           </a:p>
@@ -30931,7 +30932,7 @@
           <a:p>
             <a:fld id="{37E66D84-D695-C745-96DB-748C5AC7D514}" type="datetime1">
               <a:rPr lang="en-US" smtClean="0"/>
-              <a:t>5/12/2026</a:t>
+              <a:t>5/13/2026</a:t>
             </a:fld>
             <a:endParaRPr lang="en-US"/>
           </a:p>
@@ -31225,7 +31226,7 @@
                   <a:schemeClr val="tx2"/>
                 </a:solidFill>
               </a:rPr>
-              <a:t>5/12/2026</a:t>
+              <a:t>5/13/2026</a:t>
             </a:fld>
             <a:endParaRPr lang="en-US">
               <a:solidFill>
@@ -31708,7 +31709,7 @@
           <a:p>
             <a:fld id="{8BC944B1-A93B-F147-9A5A-D2620572B4B1}" type="datetime1">
               <a:rPr lang="en-US" smtClean="0"/>
-              <a:t>5/12/2026</a:t>
+              <a:t>5/13/2026</a:t>
             </a:fld>
             <a:endParaRPr lang="en-US"/>
           </a:p>
@@ -32379,7 +32380,7 @@
           <a:p>
             <a:fld id="{FD5A1C0D-A5B5-3D43-825A-85FAF7F7BC22}" type="datetime1">
               <a:rPr lang="en-US" smtClean="0"/>
-              <a:t>5/12/2026</a:t>
+              <a:t>5/13/2026</a:t>
             </a:fld>
             <a:endParaRPr lang="en-US"/>
           </a:p>
@@ -32790,7 +32791,7 @@
           <a:p>
             <a:fld id="{D77E73F5-CCA3-444E-8B15-361BEE3A4343}" type="datetime1">
               <a:rPr lang="en-US" smtClean="0"/>
-              <a:t>5/12/2026</a:t>
+              <a:t>5/13/2026</a:t>
             </a:fld>
             <a:endParaRPr lang="en-US"/>
           </a:p>
@@ -33590,7 +33591,7 @@
           <a:p>
             <a:fld id="{28CD2E8A-C0A9-4347-A584-9C026C30AB40}" type="datetime1">
               <a:rPr lang="en-US" smtClean="0"/>
-              <a:t>5/12/2026</a:t>
+              <a:t>5/13/2026</a:t>
             </a:fld>
             <a:endParaRPr lang="en-US"/>
           </a:p>
@@ -33862,7 +33863,7 @@
           <a:p>
             <a:fld id="{A51628BD-4B0C-2949-B92B-496E78197D17}" type="datetime1">
               <a:rPr lang="en-US" smtClean="0"/>
-              <a:t>5/12/2026</a:t>
+              <a:t>5/13/2026</a:t>
             </a:fld>
             <a:endParaRPr lang="en-US"/>
           </a:p>
@@ -34173,7 +34174,7 @@
           <a:p>
             <a:fld id="{D936E4B0-8B14-9B4C-A31A-5987B81B3FF3}" type="datetime1">
               <a:rPr lang="en-US" smtClean="0"/>
-              <a:t>5/12/2026</a:t>
+              <a:t>5/13/2026</a:t>
             </a:fld>
             <a:endParaRPr lang="en-US"/>
           </a:p>
@@ -34465,7 +34466,7 @@
           <a:p>
             <a:fld id="{86C36A54-899C-E541-8E52-4AB7D9961575}" type="datetime1">
               <a:rPr lang="en-US" smtClean="0"/>
-              <a:t>5/12/2026</a:t>
+              <a:t>5/13/2026</a:t>
             </a:fld>
             <a:endParaRPr lang="en-US"/>
           </a:p>
@@ -34741,7 +34742,7 @@
           <a:p>
             <a:fld id="{CC7A4A97-A7C4-9F40-8A0A-FE5948AA7EAD}" type="datetime1">
               <a:rPr lang="en-US" smtClean="0"/>
-              <a:t>5/12/2026</a:t>
+              <a:t>5/13/2026</a:t>
             </a:fld>
             <a:endParaRPr lang="en-US"/>
           </a:p>
@@ -35098,7 +35099,7 @@
           <a:p>
             <a:fld id="{42CCCE39-E894-AE4B-8297-21AAF0EFFD0A}" type="datetime1">
               <a:rPr lang="en-US" smtClean="0"/>
-              <a:t>5/12/2026</a:t>
+              <a:t>5/13/2026</a:t>
             </a:fld>
             <a:endParaRPr lang="en-US"/>
           </a:p>
@@ -35555,7 +35556,7 @@
           <a:p>
             <a:fld id="{AC2DDF8A-0D91-364D-A077-5FA6DB0BF384}" type="datetime1">
               <a:rPr lang="en-US" smtClean="0"/>
-              <a:t>5/12/2026</a:t>
+              <a:t>5/13/2026</a:t>
             </a:fld>
             <a:endParaRPr lang="en-US"/>
           </a:p>
@@ -35704,7 +35705,7 @@
           <a:p>
             <a:fld id="{E2360C67-8BBF-6B4F-9B47-BDE666336AA6}" type="datetime1">
               <a:rPr lang="en-US" smtClean="0"/>
-              <a:t>5/12/2026</a:t>
+              <a:t>5/13/2026</a:t>
             </a:fld>
             <a:endParaRPr lang="en-US"/>
           </a:p>
@@ -35820,7 +35821,7 @@
           <a:p>
             <a:fld id="{2DE4A657-91FB-5045-886C-E8C9E2D0FBD3}" type="datetime1">
               <a:rPr lang="en-US" smtClean="0"/>
-              <a:t>5/12/2026</a:t>
+              <a:t>5/13/2026</a:t>
             </a:fld>
             <a:endParaRPr lang="en-US"/>
           </a:p>
@@ -36130,7 +36131,7 @@
           <a:p>
             <a:fld id="{938EC984-B3DE-9046-AFE2-DCA5A31E4617}" type="datetime1">
               <a:rPr lang="en-US" smtClean="0"/>
-              <a:t>5/12/2026</a:t>
+              <a:t>5/13/2026</a:t>
             </a:fld>
             <a:endParaRPr lang="en-US"/>
           </a:p>
@@ -36423,7 +36424,7 @@
           <a:p>
             <a:fld id="{0265947F-1BAF-0347-867A-BE413595A34D}" type="datetime1">
               <a:rPr lang="en-US" smtClean="0"/>
-              <a:t>5/12/2026</a:t>
+              <a:t>5/13/2026</a:t>
             </a:fld>
             <a:endParaRPr lang="en-US"/>
           </a:p>
@@ -36866,7 +36867,7 @@
           <a:p>
             <a:fld id="{B2E8E543-FE9A-4843-9AB8-691F5895E16D}" type="datetime1">
               <a:rPr lang="en-US" smtClean="0"/>
-              <a:t>5/12/2026</a:t>
+              <a:t>5/13/2026</a:t>
             </a:fld>
             <a:endParaRPr lang="en-US"/>
           </a:p>
@@ -37069,7 +37070,7 @@
           <a:p>
             <a:fld id="{C6B4DC52-CC44-D647-BBB1-762854F46572}" type="datetime1">
               <a:rPr lang="en-US" smtClean="0"/>
-              <a:t>5/12/2026</a:t>
+              <a:t>5/13/2026</a:t>
             </a:fld>
             <a:endParaRPr lang="en-US" dirty="0"/>
           </a:p>
@@ -37311,7 +37312,7 @@
             <a:fld id="{F58F0028-8822-3F46-9369-4E11A89384E5}" type="datetime1">
               <a:rPr lang="en-US" smtClean="0"/>
               <a:pPr/>
-              <a:t>5/12/2026</a:t>
+              <a:t>5/13/2026</a:t>
             </a:fld>
             <a:endParaRPr lang="en-US"/>
           </a:p>
@@ -37571,7 +37572,7 @@
             <a:fld id="{F58F0028-8822-3F46-9369-4E11A89384E5}" type="datetime1">
               <a:rPr lang="en-US" smtClean="0"/>
               <a:pPr/>
-              <a:t>5/12/2026</a:t>
+              <a:t>5/13/2026</a:t>
             </a:fld>
             <a:endParaRPr lang="en-US"/>
           </a:p>
@@ -37903,7 +37904,7 @@
             <a:fld id="{F58F0028-8822-3F46-9369-4E11A89384E5}" type="datetime1">
               <a:rPr lang="en-US" smtClean="0"/>
               <a:pPr/>
-              <a:t>5/12/2026</a:t>
+              <a:t>5/13/2026</a:t>
             </a:fld>
             <a:endParaRPr lang="en-US"/>
           </a:p>
@@ -38360,7 +38361,7 @@
             <a:fld id="{F58F0028-8822-3F46-9369-4E11A89384E5}" type="datetime1">
               <a:rPr lang="en-US" smtClean="0"/>
               <a:pPr/>
-              <a:t>5/12/2026</a:t>
+              <a:t>5/13/2026</a:t>
             </a:fld>
             <a:endParaRPr lang="en-US"/>
           </a:p>
@@ -38483,7 +38484,7 @@
           <a:p>
             <a:fld id="{E2360C67-8BBF-6B4F-9B47-BDE666336AA6}" type="datetime1">
               <a:rPr lang="en-US" smtClean="0"/>
-              <a:t>5/12/2026</a:t>
+              <a:t>5/13/2026</a:t>
             </a:fld>
             <a:endParaRPr lang="en-US"/>
           </a:p>
@@ -38582,7 +38583,7 @@
             <a:fld id="{F58F0028-8822-3F46-9369-4E11A89384E5}" type="datetime1">
               <a:rPr lang="en-US" smtClean="0"/>
               <a:pPr/>
-              <a:t>5/12/2026</a:t>
+              <a:t>5/13/2026</a:t>
             </a:fld>
             <a:endParaRPr lang="en-US"/>
           </a:p>
@@ -38874,7 +38875,7 @@
           <a:p>
             <a:fld id="{938EC984-B3DE-9046-AFE2-DCA5A31E4617}" type="datetime1">
               <a:rPr lang="en-US" smtClean="0"/>
-              <a:t>5/12/2026</a:t>
+              <a:t>5/13/2026</a:t>
             </a:fld>
             <a:endParaRPr lang="en-US"/>
           </a:p>
@@ -39199,7 +39200,7 @@
           <a:p>
             <a:fld id="{0265947F-1BAF-0347-867A-BE413595A34D}" type="datetime1">
               <a:rPr lang="en-US" smtClean="0"/>
-              <a:t>5/12/2026</a:t>
+              <a:t>5/13/2026</a:t>
             </a:fld>
             <a:endParaRPr lang="en-US"/>
           </a:p>
@@ -39373,7 +39374,7 @@
             <a:fld id="{F58F0028-8822-3F46-9369-4E11A89384E5}" type="datetime1">
               <a:rPr lang="en-US" smtClean="0"/>
               <a:pPr/>
-              <a:t>5/12/2026</a:t>
+              <a:t>5/13/2026</a:t>
             </a:fld>
             <a:endParaRPr lang="en-US"/>
           </a:p>
@@ -39790,7 +39791,7 @@
             <a:fld id="{F58F0028-8822-3F46-9369-4E11A89384E5}" type="datetime1">
               <a:rPr lang="en-US" smtClean="0"/>
               <a:pPr/>
-              <a:t>5/12/2026</a:t>
+              <a:t>5/13/2026</a:t>
             </a:fld>
             <a:endParaRPr lang="en-US"/>
           </a:p>
@@ -40501,7 +40502,7 @@
             <a:fld id="{F58F0028-8822-3F46-9369-4E11A89384E5}" type="datetime1">
               <a:rPr lang="en-US" smtClean="0"/>
               <a:pPr/>
-              <a:t>5/12/2026</a:t>
+              <a:t>5/13/2026</a:t>
             </a:fld>
             <a:endParaRPr lang="en-US"/>
           </a:p>
@@ -41259,7 +41260,7 @@
             <a:fld id="{F58F0028-8822-3F46-9369-4E11A89384E5}" type="datetime1">
               <a:rPr lang="en-US" smtClean="0"/>
               <a:pPr/>
-              <a:t>5/12/2026</a:t>
+              <a:t>5/13/2026</a:t>
             </a:fld>
             <a:endParaRPr lang="en-US"/>
           </a:p>
@@ -41844,7 +41845,7 @@
             <a:fld id="{E2F9B567-4DEA-7E48-AA7A-6B6B391D7DD0}" type="datetime1">
               <a:rPr lang="en-US" smtClean="0"/>
               <a:pPr/>
-              <a:t>5/12/2026</a:t>
+              <a:t>5/13/2026</a:t>
             </a:fld>
             <a:endParaRPr lang="en-US" dirty="0"/>
           </a:p>
@@ -41924,6 +41925,214 @@
 </file>
 
 <file path=ppt/slides/slide10.xml><?xml version="1.0" encoding="utf-8"?>
+<p:sld xmlns:a="http://schemas.openxmlformats.org/drawingml/2006/main" xmlns:r="http://schemas.openxmlformats.org/officeDocument/2006/relationships" xmlns:p="http://schemas.openxmlformats.org/presentationml/2006/main">
+  <p:cSld>
+    <p:spTree>
+      <p:nvGrpSpPr>
+        <p:cNvPr id="1" name=""/>
+        <p:cNvGrpSpPr/>
+        <p:nvPr/>
+      </p:nvGrpSpPr>
+      <p:grpSpPr>
+        <a:xfrm>
+          <a:off x="0" y="0"/>
+          <a:ext cx="0" cy="0"/>
+          <a:chOff x="0" y="0"/>
+          <a:chExt cx="0" cy="0"/>
+        </a:xfrm>
+      </p:grpSpPr>
+      <p:sp>
+        <p:nvSpPr>
+          <p:cNvPr id="2" name="Title 1">
+            <a:extLst>
+              <a:ext uri="{FF2B5EF4-FFF2-40B4-BE49-F238E27FC236}">
+                <a16:creationId xmlns:a16="http://schemas.microsoft.com/office/drawing/2014/main" id="{9B68079C-2732-0684-E796-727E3D7AC908}"/>
+              </a:ext>
+            </a:extLst>
+          </p:cNvPr>
+          <p:cNvSpPr>
+            <a:spLocks noGrp="1"/>
+          </p:cNvSpPr>
+          <p:nvPr>
+            <p:ph type="title"/>
+          </p:nvPr>
+        </p:nvSpPr>
+        <p:spPr/>
+        <p:txBody>
+          <a:bodyPr/>
+          <a:lstStyle/>
+          <a:p>
+            <a:r>
+              <a:rPr lang="en-US" dirty="0"/>
+              <a:t>Statistical Analysis:</a:t>
+            </a:r>
+          </a:p>
+        </p:txBody>
+      </p:sp>
+      <p:sp>
+        <p:nvSpPr>
+          <p:cNvPr id="4" name="Date Placeholder 3">
+            <a:extLst>
+              <a:ext uri="{FF2B5EF4-FFF2-40B4-BE49-F238E27FC236}">
+                <a16:creationId xmlns:a16="http://schemas.microsoft.com/office/drawing/2014/main" id="{D45BBF30-884C-8D22-2191-E27804CA415E}"/>
+              </a:ext>
+            </a:extLst>
+          </p:cNvPr>
+          <p:cNvSpPr>
+            <a:spLocks noGrp="1"/>
+          </p:cNvSpPr>
+          <p:nvPr>
+            <p:ph type="dt" sz="half" idx="10"/>
+          </p:nvPr>
+        </p:nvSpPr>
+        <p:spPr/>
+        <p:txBody>
+          <a:bodyPr/>
+          <a:lstStyle/>
+          <a:p>
+            <a:fld id="{F58F0028-8822-3F46-9369-4E11A89384E5}" type="datetime1">
+              <a:rPr lang="en-US" smtClean="0"/>
+              <a:pPr/>
+              <a:t>5/13/2026</a:t>
+            </a:fld>
+            <a:endParaRPr lang="en-US"/>
+          </a:p>
+        </p:txBody>
+      </p:sp>
+      <p:sp>
+        <p:nvSpPr>
+          <p:cNvPr id="5" name="Footer Placeholder 4">
+            <a:extLst>
+              <a:ext uri="{FF2B5EF4-FFF2-40B4-BE49-F238E27FC236}">
+                <a16:creationId xmlns:a16="http://schemas.microsoft.com/office/drawing/2014/main" id="{2EFB34A9-3306-4EB9-9D82-7E65A8551EAC}"/>
+              </a:ext>
+            </a:extLst>
+          </p:cNvPr>
+          <p:cNvSpPr>
+            <a:spLocks noGrp="1"/>
+          </p:cNvSpPr>
+          <p:nvPr>
+            <p:ph type="ftr" sz="quarter" idx="11"/>
+          </p:nvPr>
+        </p:nvSpPr>
+        <p:spPr/>
+        <p:txBody>
+          <a:bodyPr/>
+          <a:lstStyle/>
+          <a:p>
+            <a:r>
+              <a:rPr lang="en-US" dirty="0"/>
+              <a:t>Historical Unemployment in the United States</a:t>
+            </a:r>
+          </a:p>
+        </p:txBody>
+      </p:sp>
+      <p:sp>
+        <p:nvSpPr>
+          <p:cNvPr id="6" name="Slide Number Placeholder 5">
+            <a:extLst>
+              <a:ext uri="{FF2B5EF4-FFF2-40B4-BE49-F238E27FC236}">
+                <a16:creationId xmlns:a16="http://schemas.microsoft.com/office/drawing/2014/main" id="{A43FB104-533B-333D-5918-0D9F66A71D16}"/>
+              </a:ext>
+            </a:extLst>
+          </p:cNvPr>
+          <p:cNvSpPr>
+            <a:spLocks noGrp="1"/>
+          </p:cNvSpPr>
+          <p:nvPr>
+            <p:ph type="sldNum" sz="quarter" idx="12"/>
+          </p:nvPr>
+        </p:nvSpPr>
+        <p:spPr/>
+        <p:txBody>
+          <a:bodyPr>
+            <a:normAutofit lnSpcReduction="10000"/>
+          </a:bodyPr>
+          <a:lstStyle/>
+          <a:p>
+            <a:fld id="{40B778AE-8D30-EC43-B255-420E7914C179}" type="slidenum">
+              <a:rPr lang="en-US" smtClean="0"/>
+              <a:pPr/>
+              <a:t>10</a:t>
+            </a:fld>
+            <a:endParaRPr lang="en-US"/>
+          </a:p>
+        </p:txBody>
+      </p:sp>
+      <p:pic>
+        <p:nvPicPr>
+          <p:cNvPr id="18" name="Picture 17">
+            <a:extLst>
+              <a:ext uri="{FF2B5EF4-FFF2-40B4-BE49-F238E27FC236}">
+                <a16:creationId xmlns:a16="http://schemas.microsoft.com/office/drawing/2014/main" id="{D7FC7ED1-24D8-9200-E8D5-7B9FF5780DE4}"/>
+              </a:ext>
+            </a:extLst>
+          </p:cNvPr>
+          <p:cNvPicPr>
+            <a:picLocks noChangeAspect="1"/>
+          </p:cNvPicPr>
+          <p:nvPr/>
+        </p:nvPicPr>
+        <p:blipFill>
+          <a:blip r:embed="rId2"/>
+          <a:stretch>
+            <a:fillRect/>
+          </a:stretch>
+        </p:blipFill>
+        <p:spPr>
+          <a:xfrm>
+            <a:off x="162118" y="1956493"/>
+            <a:ext cx="5321573" cy="3285957"/>
+          </a:xfrm>
+          <a:prstGeom prst="rect">
+            <a:avLst/>
+          </a:prstGeom>
+        </p:spPr>
+      </p:pic>
+      <p:pic>
+        <p:nvPicPr>
+          <p:cNvPr id="20" name="Picture 19">
+            <a:extLst>
+              <a:ext uri="{FF2B5EF4-FFF2-40B4-BE49-F238E27FC236}">
+                <a16:creationId xmlns:a16="http://schemas.microsoft.com/office/drawing/2014/main" id="{4DC2AEE9-BFC0-711D-F9DC-1FEA9960FF55}"/>
+              </a:ext>
+            </a:extLst>
+          </p:cNvPr>
+          <p:cNvPicPr>
+            <a:picLocks noChangeAspect="1"/>
+          </p:cNvPicPr>
+          <p:nvPr/>
+        </p:nvPicPr>
+        <p:blipFill>
+          <a:blip r:embed="rId3"/>
+          <a:stretch>
+            <a:fillRect/>
+          </a:stretch>
+        </p:blipFill>
+        <p:spPr>
+          <a:xfrm>
+            <a:off x="5632315" y="2986539"/>
+            <a:ext cx="5354042" cy="3285957"/>
+          </a:xfrm>
+          <a:prstGeom prst="rect">
+            <a:avLst/>
+          </a:prstGeom>
+        </p:spPr>
+      </p:pic>
+    </p:spTree>
+    <p:extLst>
+      <p:ext uri="{BB962C8B-B14F-4D97-AF65-F5344CB8AC3E}">
+        <p14:creationId xmlns:p14="http://schemas.microsoft.com/office/powerpoint/2010/main" val="4068412359"/>
+      </p:ext>
+    </p:extLst>
+  </p:cSld>
+  <p:clrMapOvr>
+    <a:masterClrMapping/>
+  </p:clrMapOvr>
+</p:sld>
+</file>
+
+<file path=ppt/slides/slide11.xml><?xml version="1.0" encoding="utf-8"?>
 <p:sld xmlns:a="http://schemas.openxmlformats.org/drawingml/2006/main" xmlns:r="http://schemas.openxmlformats.org/officeDocument/2006/relationships" xmlns:p="http://schemas.openxmlformats.org/presentationml/2006/main">
   <p:cSld>
     <p:bg>
@@ -42159,7 +42368,7 @@
                   <a:spcPts val="600"/>
                 </a:spcAft>
               </a:pPr>
-              <a:t>5/12/2026</a:t>
+              <a:t>5/13/2026</a:t>
             </a:fld>
             <a:endParaRPr lang="en-US">
               <a:solidFill>
@@ -42260,7 +42469,7 @@
                   <a:spcPts val="600"/>
                 </a:spcAft>
               </a:pPr>
-              <a:t>10</a:t>
+              <a:t>11</a:t>
             </a:fld>
             <a:endParaRPr lang="en-US">
               <a:solidFill>
@@ -42317,7 +42526,7 @@
 </p:sld>
 </file>
 
-<file path=ppt/slides/slide11.xml><?xml version="1.0" encoding="utf-8"?>
+<file path=ppt/slides/slide12.xml><?xml version="1.0" encoding="utf-8"?>
 <p:sld xmlns:a="http://schemas.openxmlformats.org/drawingml/2006/main" xmlns:r="http://schemas.openxmlformats.org/officeDocument/2006/relationships" xmlns:p="http://schemas.openxmlformats.org/presentationml/2006/main">
   <p:cSld>
     <p:spTree>
@@ -42417,7 +42626,7 @@
             <a:fld id="{F58F0028-8822-3F46-9369-4E11A89384E5}" type="datetime1">
               <a:rPr lang="en-US" smtClean="0"/>
               <a:pPr/>
-              <a:t>5/12/2026</a:t>
+              <a:t>5/13/2026</a:t>
             </a:fld>
             <a:endParaRPr lang="en-US"/>
           </a:p>
@@ -42477,7 +42686,7 @@
             <a:fld id="{40B778AE-8D30-EC43-B255-420E7914C179}" type="slidenum">
               <a:rPr lang="en-US" smtClean="0"/>
               <a:pPr/>
-              <a:t>11</a:t>
+              <a:t>12</a:t>
             </a:fld>
             <a:endParaRPr lang="en-US"/>
           </a:p>
@@ -42496,7 +42705,7 @@
 </p:sld>
 </file>
 
-<file path=ppt/slides/slide12.xml><?xml version="1.0" encoding="utf-8"?>
+<file path=ppt/slides/slide13.xml><?xml version="1.0" encoding="utf-8"?>
 <p:sld xmlns:a="http://schemas.openxmlformats.org/drawingml/2006/main" xmlns:r="http://schemas.openxmlformats.org/officeDocument/2006/relationships" xmlns:p="http://schemas.openxmlformats.org/presentationml/2006/main">
   <p:cSld>
     <p:bg>
@@ -42720,7 +42929,7 @@
                   <a:spcPts val="600"/>
                 </a:spcAft>
               </a:pPr>
-              <a:t>5/12/2026</a:t>
+              <a:t>5/13/2026</a:t>
             </a:fld>
             <a:endParaRPr lang="en-US"/>
           </a:p>
@@ -42807,7 +43016,7 @@
                   <a:spcPts val="600"/>
                 </a:spcAft>
               </a:pPr>
-              <a:t>12</a:t>
+              <a:t>13</a:t>
             </a:fld>
             <a:endParaRPr lang="en-US"/>
           </a:p>
@@ -42919,7 +43128,7 @@
 </p:sld>
 </file>
 
-<file path=ppt/slides/slide13.xml><?xml version="1.0" encoding="utf-8"?>
+<file path=ppt/slides/slide14.xml><?xml version="1.0" encoding="utf-8"?>
 <p:sld xmlns:a="http://schemas.openxmlformats.org/drawingml/2006/main" xmlns:r="http://schemas.openxmlformats.org/officeDocument/2006/relationships" xmlns:p="http://schemas.openxmlformats.org/presentationml/2006/main">
   <p:cSld>
     <p:spTree>
@@ -43014,7 +43223,7 @@
             <a:fld id="{F58F0028-8822-3F46-9369-4E11A89384E5}" type="datetime1">
               <a:rPr lang="en-US" smtClean="0"/>
               <a:pPr/>
-              <a:t>5/12/2026</a:t>
+              <a:t>5/13/2026</a:t>
             </a:fld>
             <a:endParaRPr lang="en-US"/>
           </a:p>
@@ -43074,7 +43283,7 @@
             <a:fld id="{40B778AE-8D30-EC43-B255-420E7914C179}" type="slidenum">
               <a:rPr lang="en-US" smtClean="0"/>
               <a:pPr/>
-              <a:t>13</a:t>
+              <a:t>14</a:t>
             </a:fld>
             <a:endParaRPr lang="en-US"/>
           </a:p>
@@ -43093,7 +43302,7 @@
 </p:sld>
 </file>
 
-<file path=ppt/slides/slide14.xml><?xml version="1.0" encoding="utf-8"?>
+<file path=ppt/slides/slide15.xml><?xml version="1.0" encoding="utf-8"?>
 <p:sld xmlns:a="http://schemas.openxmlformats.org/drawingml/2006/main" xmlns:r="http://schemas.openxmlformats.org/officeDocument/2006/relationships" xmlns:p="http://schemas.openxmlformats.org/presentationml/2006/main">
   <p:cSld>
     <p:spTree>
@@ -43271,7 +43480,7 @@
             <a:fld id="{F58F0028-8822-3F46-9369-4E11A89384E5}" type="datetime1">
               <a:rPr lang="en-US" smtClean="0"/>
               <a:pPr/>
-              <a:t>5/12/2026</a:t>
+              <a:t>5/13/2026</a:t>
             </a:fld>
             <a:endParaRPr lang="en-US"/>
           </a:p>
@@ -43331,7 +43540,7 @@
             <a:fld id="{40B778AE-8D30-EC43-B255-420E7914C179}" type="slidenum">
               <a:rPr lang="en-US" smtClean="0"/>
               <a:pPr/>
-              <a:t>14</a:t>
+              <a:t>15</a:t>
             </a:fld>
             <a:endParaRPr lang="en-US"/>
           </a:p>
@@ -43449,7 +43658,7 @@
           <a:p>
             <a:fld id="{CF2CF59F-16CF-294B-89B0-023DBFDF062C}" type="datetime1">
               <a:rPr lang="en-US" smtClean="0"/>
-              <a:t>5/12/2026</a:t>
+              <a:t>5/13/2026</a:t>
             </a:fld>
             <a:endParaRPr lang="en-US"/>
           </a:p>
@@ -43658,7 +43867,7 @@
                   <a:spcPts val="600"/>
                 </a:spcAft>
               </a:pPr>
-              <a:t>5/12/2026</a:t>
+              <a:t>5/13/2026</a:t>
             </a:fld>
             <a:endParaRPr lang="en-US"/>
           </a:p>
@@ -43958,7 +44167,7 @@
             <a:fld id="{F58F0028-8822-3F46-9369-4E11A89384E5}" type="datetime1">
               <a:rPr lang="en-US" smtClean="0"/>
               <a:pPr/>
-              <a:t>5/12/2026</a:t>
+              <a:t>5/13/2026</a:t>
             </a:fld>
             <a:endParaRPr lang="en-US"/>
           </a:p>
@@ -44206,7 +44415,7 @@
                   <a:spcPts val="600"/>
                 </a:spcAft>
               </a:pPr>
-              <a:t>5/12/2026</a:t>
+              <a:t>5/13/2026</a:t>
             </a:fld>
             <a:endParaRPr lang="en-US">
               <a:solidFill>
@@ -44527,7 +44736,7 @@
             <a:fld id="{F58F0028-8822-3F46-9369-4E11A89384E5}" type="datetime1">
               <a:rPr lang="en-US" smtClean="0"/>
               <a:pPr/>
-              <a:t>5/12/2026</a:t>
+              <a:t>5/13/2026</a:t>
             </a:fld>
             <a:endParaRPr lang="en-US"/>
           </a:p>
@@ -44746,7 +44955,7 @@
             <a:fld id="{F58F0028-8822-3F46-9369-4E11A89384E5}" type="datetime1">
               <a:rPr lang="en-US" smtClean="0"/>
               <a:pPr/>
-              <a:t>5/12/2026</a:t>
+              <a:t>5/13/2026</a:t>
             </a:fld>
             <a:endParaRPr lang="en-US"/>
           </a:p>
@@ -44814,10 +45023,10 @@
       </p:sp>
       <p:pic>
         <p:nvPicPr>
-          <p:cNvPr id="8" name="Picture 7">
+          <p:cNvPr id="9" name="Picture 8">
             <a:extLst>
               <a:ext uri="{FF2B5EF4-FFF2-40B4-BE49-F238E27FC236}">
-                <a16:creationId xmlns:a16="http://schemas.microsoft.com/office/drawing/2014/main" id="{7736A338-1E24-1D8C-DCA9-6C6DC0567EE7}"/>
+                <a16:creationId xmlns:a16="http://schemas.microsoft.com/office/drawing/2014/main" id="{9F7DB998-1C8A-7552-48A4-4AD6D6301FAA}"/>
               </a:ext>
             </a:extLst>
           </p:cNvPr>
@@ -44828,15 +45037,14 @@
         </p:nvPicPr>
         <p:blipFill>
           <a:blip r:embed="rId2"/>
-          <a:srcRect l="1295"/>
           <a:stretch>
             <a:fillRect/>
           </a:stretch>
         </p:blipFill>
         <p:spPr>
           <a:xfrm>
-            <a:off x="5087566" y="66105"/>
-            <a:ext cx="6205274" cy="3863870"/>
+            <a:off x="105667" y="3392688"/>
+            <a:ext cx="6205274" cy="3282840"/>
           </a:xfrm>
           <a:prstGeom prst="rect">
             <a:avLst/>
@@ -44845,10 +45053,10 @@
       </p:pic>
       <p:pic>
         <p:nvPicPr>
-          <p:cNvPr id="11" name="Picture 10">
+          <p:cNvPr id="8" name="Picture 7">
             <a:extLst>
               <a:ext uri="{FF2B5EF4-FFF2-40B4-BE49-F238E27FC236}">
-                <a16:creationId xmlns:a16="http://schemas.microsoft.com/office/drawing/2014/main" id="{1E05CE8D-E37F-9913-F261-2EAAD2D438BF}"/>
+                <a16:creationId xmlns:a16="http://schemas.microsoft.com/office/drawing/2014/main" id="{7736A338-1E24-1D8C-DCA9-6C6DC0567EE7}"/>
               </a:ext>
             </a:extLst>
           </p:cNvPr>
@@ -44859,14 +45067,15 @@
         </p:nvPicPr>
         <p:blipFill>
           <a:blip r:embed="rId3"/>
+          <a:srcRect l="1295"/>
           <a:stretch>
             <a:fillRect/>
           </a:stretch>
         </p:blipFill>
         <p:spPr>
           <a:xfrm>
-            <a:off x="424767" y="3813243"/>
-            <a:ext cx="5650659" cy="2913547"/>
+            <a:off x="5337524" y="66105"/>
+            <a:ext cx="5955315" cy="3708227"/>
           </a:xfrm>
           <a:prstGeom prst="rect">
             <a:avLst/>
@@ -44891,7 +45100,13 @@
   <p:cSld>
     <p:spTree>
       <p:nvGrpSpPr>
-        <p:cNvPr id="1" name=""/>
+        <p:cNvPr id="1" name="">
+          <a:extLst>
+            <a:ext uri="{FF2B5EF4-FFF2-40B4-BE49-F238E27FC236}">
+              <a16:creationId xmlns:a16="http://schemas.microsoft.com/office/drawing/2014/main" id="{3E73AF5A-B8A3-831F-C692-BBF14F66E45D}"/>
+            </a:ext>
+          </a:extLst>
+        </p:cNvPr>
         <p:cNvGrpSpPr/>
         <p:nvPr/>
       </p:nvGrpSpPr>
@@ -44908,7 +45123,7 @@
           <p:cNvPr id="2" name="Title 1">
             <a:extLst>
               <a:ext uri="{FF2B5EF4-FFF2-40B4-BE49-F238E27FC236}">
-                <a16:creationId xmlns:a16="http://schemas.microsoft.com/office/drawing/2014/main" id="{9B68079C-2732-0684-E796-727E3D7AC908}"/>
+                <a16:creationId xmlns:a16="http://schemas.microsoft.com/office/drawing/2014/main" id="{3D789E9A-9FA9-DA2A-D992-E514A9853B4A}"/>
               </a:ext>
             </a:extLst>
           </p:cNvPr>
@@ -44936,7 +45151,7 @@
           <p:cNvPr id="3" name="Content Placeholder 2">
             <a:extLst>
               <a:ext uri="{FF2B5EF4-FFF2-40B4-BE49-F238E27FC236}">
-                <a16:creationId xmlns:a16="http://schemas.microsoft.com/office/drawing/2014/main" id="{A6AF2D59-FD32-A707-02ED-0E8DF8806521}"/>
+                <a16:creationId xmlns:a16="http://schemas.microsoft.com/office/drawing/2014/main" id="{58FD96BF-392C-3257-9CDC-EA282D35F57D}"/>
               </a:ext>
             </a:extLst>
           </p:cNvPr>
@@ -44950,7 +45165,7 @@
         <p:spPr>
           <a:xfrm>
             <a:off x="1261872" y="1828800"/>
-            <a:ext cx="5965779" cy="4351337"/>
+            <a:ext cx="3100578" cy="4351337"/>
           </a:xfrm>
         </p:spPr>
         <p:txBody>
@@ -44959,42 +45174,29 @@
           <a:p>
             <a:r>
               <a:rPr lang="en-US" dirty="0"/>
-              <a:t>Pearson Correlation Test (Population density, unemployment)</a:t>
+              <a:t>Pearson Correlation Test for </a:t>
+            </a:r>
+            <a:r>
+              <a:rPr lang="en-US" b="1" dirty="0"/>
+              <a:t>ALL STATES </a:t>
+            </a:r>
+            <a:r>
+              <a:rPr lang="en-US" dirty="0"/>
+              <a:t>(Population density, unemployment)</a:t>
             </a:r>
           </a:p>
           <a:p>
             <a:pPr lvl="1"/>
             <a:r>
               <a:rPr lang="en-US" dirty="0"/>
-              <a:t>p = 0.0946</a:t>
+              <a:t>p = 0.22</a:t>
             </a:r>
           </a:p>
           <a:p>
             <a:pPr lvl="1"/>
             <a:r>
               <a:rPr lang="en-US" dirty="0"/>
-              <a:t>Correlation coefficient = 0.2828599</a:t>
-            </a:r>
-          </a:p>
-          <a:p>
-            <a:pPr lvl="1"/>
-            <a:r>
-              <a:rPr lang="en-US" dirty="0"/>
-              <a:t>Per state:</a:t>
-            </a:r>
-          </a:p>
-          <a:p>
-            <a:pPr lvl="2"/>
-            <a:r>
-              <a:rPr lang="en-US" dirty="0"/>
-              <a:t>Only California has positive correlation</a:t>
-            </a:r>
-          </a:p>
-          <a:p>
-            <a:pPr lvl="2"/>
-            <a:r>
-              <a:rPr lang="en-US" dirty="0"/>
-              <a:t>Typically, lower density = higher unemployment (CA exception) </a:t>
+              <a:t>Correlation coefficient = 0.10</a:t>
             </a:r>
           </a:p>
           <a:p>
@@ -45007,14 +45209,14 @@
             <a:pPr lvl="1"/>
             <a:r>
               <a:rPr lang="en-US" dirty="0"/>
-              <a:t>p = 0.02295</a:t>
+              <a:t>p = 7.127e-11 (Near zero!)</a:t>
             </a:r>
           </a:p>
           <a:p>
             <a:pPr lvl="1"/>
             <a:r>
               <a:rPr lang="en-US" dirty="0"/>
-              <a:t>Correlation coefficient = 0.3781806</a:t>
+              <a:t>Correlation coefficient = 0.50</a:t>
             </a:r>
           </a:p>
           <a:p>
@@ -45028,7 +45230,7 @@
           <p:cNvPr id="4" name="Date Placeholder 3">
             <a:extLst>
               <a:ext uri="{FF2B5EF4-FFF2-40B4-BE49-F238E27FC236}">
-                <a16:creationId xmlns:a16="http://schemas.microsoft.com/office/drawing/2014/main" id="{D45BBF30-884C-8D22-2191-E27804CA415E}"/>
+                <a16:creationId xmlns:a16="http://schemas.microsoft.com/office/drawing/2014/main" id="{0A3D55BC-9347-3113-58EC-EF14B35C9B3F}"/>
               </a:ext>
             </a:extLst>
           </p:cNvPr>
@@ -45047,7 +45249,7 @@
             <a:fld id="{F58F0028-8822-3F46-9369-4E11A89384E5}" type="datetime1">
               <a:rPr lang="en-US" smtClean="0"/>
               <a:pPr/>
-              <a:t>5/12/2026</a:t>
+              <a:t>5/14/2026</a:t>
             </a:fld>
             <a:endParaRPr lang="en-US"/>
           </a:p>
@@ -45058,7 +45260,7 @@
           <p:cNvPr id="5" name="Footer Placeholder 4">
             <a:extLst>
               <a:ext uri="{FF2B5EF4-FFF2-40B4-BE49-F238E27FC236}">
-                <a16:creationId xmlns:a16="http://schemas.microsoft.com/office/drawing/2014/main" id="{2EFB34A9-3306-4EB9-9D82-7E65A8551EAC}"/>
+                <a16:creationId xmlns:a16="http://schemas.microsoft.com/office/drawing/2014/main" id="{8524EB76-9BEA-73E5-8D87-AB1D23FB02C6}"/>
               </a:ext>
             </a:extLst>
           </p:cNvPr>
@@ -45086,7 +45288,7 @@
           <p:cNvPr id="6" name="Slide Number Placeholder 5">
             <a:extLst>
               <a:ext uri="{FF2B5EF4-FFF2-40B4-BE49-F238E27FC236}">
-                <a16:creationId xmlns:a16="http://schemas.microsoft.com/office/drawing/2014/main" id="{A43FB104-533B-333D-5918-0D9F66A71D16}"/>
+                <a16:creationId xmlns:a16="http://schemas.microsoft.com/office/drawing/2014/main" id="{8FB1FB42-B11A-CA2C-8107-098A401A55C1}"/>
               </a:ext>
             </a:extLst>
           </p:cNvPr>
@@ -45115,10 +45317,10 @@
       </p:sp>
       <p:pic>
         <p:nvPicPr>
-          <p:cNvPr id="11" name="Picture 10">
+          <p:cNvPr id="9" name="Picture 8">
             <a:extLst>
               <a:ext uri="{FF2B5EF4-FFF2-40B4-BE49-F238E27FC236}">
-                <a16:creationId xmlns:a16="http://schemas.microsoft.com/office/drawing/2014/main" id="{B697B1B0-5C11-6E59-8916-872BA281C39A}"/>
+                <a16:creationId xmlns:a16="http://schemas.microsoft.com/office/drawing/2014/main" id="{6854C597-FFFF-98AD-3713-484841853956}"/>
               </a:ext>
             </a:extLst>
           </p:cNvPr>
@@ -45135,38 +45337,8 @@
         </p:blipFill>
         <p:spPr>
           <a:xfrm>
-            <a:off x="7227651" y="3429000"/>
-            <a:ext cx="3702478" cy="1669325"/>
-          </a:xfrm>
-          <a:prstGeom prst="rect">
-            <a:avLst/>
-          </a:prstGeom>
-        </p:spPr>
-      </p:pic>
-      <p:pic>
-        <p:nvPicPr>
-          <p:cNvPr id="8" name="Picture 7">
-            <a:extLst>
-              <a:ext uri="{FF2B5EF4-FFF2-40B4-BE49-F238E27FC236}">
-                <a16:creationId xmlns:a16="http://schemas.microsoft.com/office/drawing/2014/main" id="{4CE6E372-BDE8-BD2E-51CD-34DD8D3BC12D}"/>
-              </a:ext>
-            </a:extLst>
-          </p:cNvPr>
-          <p:cNvPicPr>
-            <a:picLocks noChangeAspect="1"/>
-          </p:cNvPicPr>
-          <p:nvPr/>
-        </p:nvPicPr>
-        <p:blipFill>
-          <a:blip r:embed="rId3"/>
-          <a:stretch>
-            <a:fillRect/>
-          </a:stretch>
-        </p:blipFill>
-        <p:spPr>
-          <a:xfrm>
-            <a:off x="6921398" y="495866"/>
-            <a:ext cx="4314984" cy="2665867"/>
+            <a:off x="4530651" y="1828799"/>
+            <a:ext cx="6380825" cy="3971925"/>
           </a:xfrm>
           <a:prstGeom prst="rect">
             <a:avLst/>
@@ -45176,7 +45348,7 @@
     </p:spTree>
     <p:extLst>
       <p:ext uri="{BB962C8B-B14F-4D97-AF65-F5344CB8AC3E}">
-        <p14:creationId xmlns:p14="http://schemas.microsoft.com/office/powerpoint/2010/main" val="4068412359"/>
+        <p14:creationId xmlns:p14="http://schemas.microsoft.com/office/powerpoint/2010/main" val="1009521683"/>
       </p:ext>
     </p:extLst>
   </p:cSld>
@@ -45194,7 +45366,7 @@
         <p:cNvPr id="1" name="">
           <a:extLst>
             <a:ext uri="{FF2B5EF4-FFF2-40B4-BE49-F238E27FC236}">
-              <a16:creationId xmlns:a16="http://schemas.microsoft.com/office/drawing/2014/main" id="{AC0116C0-BADD-83C4-8314-1BD866AF0476}"/>
+              <a16:creationId xmlns:a16="http://schemas.microsoft.com/office/drawing/2014/main" id="{BC18B756-DFDD-E98C-593A-40CC616DB331}"/>
             </a:ext>
           </a:extLst>
         </p:cNvPr>
@@ -45214,7 +45386,7 @@
           <p:cNvPr id="2" name="Title 1">
             <a:extLst>
               <a:ext uri="{FF2B5EF4-FFF2-40B4-BE49-F238E27FC236}">
-                <a16:creationId xmlns:a16="http://schemas.microsoft.com/office/drawing/2014/main" id="{72DCC9DF-0E86-C43B-C68F-8E69F443ABA3}"/>
+                <a16:creationId xmlns:a16="http://schemas.microsoft.com/office/drawing/2014/main" id="{0C2826B8-1921-DB8D-F060-EE97DEF1F901}"/>
               </a:ext>
             </a:extLst>
           </p:cNvPr>
@@ -45239,10 +45411,102 @@
       </p:sp>
       <p:sp>
         <p:nvSpPr>
+          <p:cNvPr id="3" name="Content Placeholder 2">
+            <a:extLst>
+              <a:ext uri="{FF2B5EF4-FFF2-40B4-BE49-F238E27FC236}">
+                <a16:creationId xmlns:a16="http://schemas.microsoft.com/office/drawing/2014/main" id="{8D595F99-7D2C-01D1-274C-1A65B6075AAE}"/>
+              </a:ext>
+            </a:extLst>
+          </p:cNvPr>
+          <p:cNvSpPr>
+            <a:spLocks noGrp="1"/>
+          </p:cNvSpPr>
+          <p:nvPr>
+            <p:ph idx="1"/>
+          </p:nvPr>
+        </p:nvSpPr>
+        <p:spPr>
+          <a:xfrm>
+            <a:off x="1261872" y="1828800"/>
+            <a:ext cx="3100578" cy="4351337"/>
+          </a:xfrm>
+        </p:spPr>
+        <p:txBody>
+          <a:bodyPr>
+            <a:normAutofit lnSpcReduction="10000"/>
+          </a:bodyPr>
+          <a:lstStyle/>
+          <a:p>
+            <a:r>
+              <a:rPr lang="en-US" dirty="0"/>
+              <a:t>Pearson Correlation Test for </a:t>
+            </a:r>
+            <a:r>
+              <a:rPr lang="en-US" b="1" dirty="0"/>
+              <a:t>MY STATES</a:t>
+            </a:r>
+            <a:r>
+              <a:rPr lang="en-US" dirty="0"/>
+              <a:t> (Population density, unemployment)</a:t>
+            </a:r>
+          </a:p>
+          <a:p>
+            <a:pPr lvl="1"/>
+            <a:r>
+              <a:rPr lang="en-US" dirty="0"/>
+              <a:t>p = 0.0946</a:t>
+            </a:r>
+          </a:p>
+          <a:p>
+            <a:pPr lvl="1"/>
+            <a:r>
+              <a:rPr lang="en-US" dirty="0"/>
+              <a:t>Correlation coefficient = 0.2828599</a:t>
+            </a:r>
+          </a:p>
+          <a:p>
+            <a:pPr lvl="2"/>
+            <a:r>
+              <a:rPr lang="en-US" dirty="0"/>
+              <a:t>Typically, lower density = higher unemployment (CA exception) </a:t>
+            </a:r>
+          </a:p>
+          <a:p>
+            <a:r>
+              <a:rPr lang="en-US" dirty="0"/>
+              <a:t>Retest Pearson, logarithmically transformed</a:t>
+            </a:r>
+          </a:p>
+          <a:p>
+            <a:pPr lvl="1"/>
+            <a:r>
+              <a:rPr lang="en-US" dirty="0"/>
+              <a:t>p = 0.02295</a:t>
+            </a:r>
+          </a:p>
+          <a:p>
+            <a:pPr lvl="1"/>
+            <a:r>
+              <a:rPr lang="en-US" dirty="0"/>
+              <a:t>Correlation coefficient = 0.3781806</a:t>
+            </a:r>
+          </a:p>
+          <a:p>
+            <a:pPr lvl="2"/>
+            <a:endParaRPr lang="en-US" dirty="0"/>
+          </a:p>
+          <a:p>
+            <a:pPr lvl="2"/>
+            <a:endParaRPr lang="en-US" dirty="0"/>
+          </a:p>
+        </p:txBody>
+      </p:sp>
+      <p:sp>
+        <p:nvSpPr>
           <p:cNvPr id="4" name="Date Placeholder 3">
             <a:extLst>
               <a:ext uri="{FF2B5EF4-FFF2-40B4-BE49-F238E27FC236}">
-                <a16:creationId xmlns:a16="http://schemas.microsoft.com/office/drawing/2014/main" id="{EF5E39A7-DB9E-0CD2-A6C7-9A6755B4F22E}"/>
+                <a16:creationId xmlns:a16="http://schemas.microsoft.com/office/drawing/2014/main" id="{A243F78A-8164-23C7-5FFD-E225C3AE55EB}"/>
               </a:ext>
             </a:extLst>
           </p:cNvPr>
@@ -45261,7 +45525,7 @@
             <a:fld id="{F58F0028-8822-3F46-9369-4E11A89384E5}" type="datetime1">
               <a:rPr lang="en-US" smtClean="0"/>
               <a:pPr/>
-              <a:t>5/12/2026</a:t>
+              <a:t>5/14/2026</a:t>
             </a:fld>
             <a:endParaRPr lang="en-US"/>
           </a:p>
@@ -45272,7 +45536,7 @@
           <p:cNvPr id="5" name="Footer Placeholder 4">
             <a:extLst>
               <a:ext uri="{FF2B5EF4-FFF2-40B4-BE49-F238E27FC236}">
-                <a16:creationId xmlns:a16="http://schemas.microsoft.com/office/drawing/2014/main" id="{B2E400E4-A05B-01A2-0559-FFA8639E2D6D}"/>
+                <a16:creationId xmlns:a16="http://schemas.microsoft.com/office/drawing/2014/main" id="{3864038E-DAF0-F245-2397-459872AF4AE8}"/>
               </a:ext>
             </a:extLst>
           </p:cNvPr>
@@ -45300,7 +45564,7 @@
           <p:cNvPr id="6" name="Slide Number Placeholder 5">
             <a:extLst>
               <a:ext uri="{FF2B5EF4-FFF2-40B4-BE49-F238E27FC236}">
-                <a16:creationId xmlns:a16="http://schemas.microsoft.com/office/drawing/2014/main" id="{2D917C3A-87E0-A720-5E57-E0192834945F}"/>
+                <a16:creationId xmlns:a16="http://schemas.microsoft.com/office/drawing/2014/main" id="{ADEA2EF0-E0DF-7408-B92F-AA15BFD66C47}"/>
               </a:ext>
             </a:extLst>
           </p:cNvPr>
@@ -45329,10 +45593,10 @@
       </p:sp>
       <p:pic>
         <p:nvPicPr>
-          <p:cNvPr id="8" name="Picture 7" descr="[FINAL] Pearson Correlation Scatterplot.png">
+          <p:cNvPr id="7" name="Picture 6">
             <a:extLst>
               <a:ext uri="{FF2B5EF4-FFF2-40B4-BE49-F238E27FC236}">
-                <a16:creationId xmlns:a16="http://schemas.microsoft.com/office/drawing/2014/main" id="{C9CEC18D-F209-4982-A768-7FCD7B8230E1}"/>
+                <a16:creationId xmlns:a16="http://schemas.microsoft.com/office/drawing/2014/main" id="{8E979EE7-17F6-D05A-2BD4-FBAF8A5B7D16}"/>
               </a:ext>
             </a:extLst>
           </p:cNvPr>
@@ -45349,8 +45613,8 @@
         </p:blipFill>
         <p:spPr>
           <a:xfrm>
-            <a:off x="1453820" y="1691322"/>
-            <a:ext cx="7775037" cy="4800918"/>
+            <a:off x="4510120" y="1828801"/>
+            <a:ext cx="6444392" cy="3981450"/>
           </a:xfrm>
           <a:prstGeom prst="rect">
             <a:avLst/>
@@ -45360,7 +45624,7 @@
     </p:spTree>
     <p:extLst>
       <p:ext uri="{BB962C8B-B14F-4D97-AF65-F5344CB8AC3E}">
-        <p14:creationId xmlns:p14="http://schemas.microsoft.com/office/powerpoint/2010/main" val="960582693"/>
+        <p14:creationId xmlns:p14="http://schemas.microsoft.com/office/powerpoint/2010/main" val="2962999744"/>
       </p:ext>
     </p:extLst>
   </p:cSld>
@@ -46160,26 +46424,6 @@
 </file>
 
 <file path=customXml/item1.xml><?xml version="1.0" encoding="utf-8"?>
-<p:properties xmlns:p="http://schemas.microsoft.com/office/2006/metadata/properties" xmlns:xsi="http://www.w3.org/2001/XMLSchema-instance" xmlns:pc="http://schemas.microsoft.com/office/infopath/2007/PartnerControls">
-  <documentManagement>
-    <_ip_UnifiedCompliancePolicyUIAction xmlns="http://schemas.microsoft.com/sharepoint/v3" xsi:nil="true"/>
-    <Image xmlns="71af3243-3dd4-4a8d-8c0d-dd76da1f02a5">
-      <Url xsi:nil="true"/>
-      <Description xsi:nil="true"/>
-    </Image>
-    <Status xmlns="71af3243-3dd4-4a8d-8c0d-dd76da1f02a5">Not started</Status>
-    <Background xmlns="71af3243-3dd4-4a8d-8c0d-dd76da1f02a5">false</Background>
-    <_ip_UnifiedCompliancePolicyProperties xmlns="http://schemas.microsoft.com/sharepoint/v3" xsi:nil="true"/>
-    <ImageTagsTaxHTField xmlns="71af3243-3dd4-4a8d-8c0d-dd76da1f02a5">
-      <Terms xmlns="http://schemas.microsoft.com/office/infopath/2007/PartnerControls"/>
-    </ImageTagsTaxHTField>
-    <TaxCatchAll xmlns="230e9df3-be65-4c73-a93b-d1236ebd677e" xsi:nil="true"/>
-    <MediaServiceKeyPoints xmlns="71af3243-3dd4-4a8d-8c0d-dd76da1f02a5" xsi:nil="true"/>
-  </documentManagement>
-</p:properties>
-</file>
-
-<file path=customXml/item2.xml><?xml version="1.0" encoding="utf-8"?>
 <ct:contentTypeSchema xmlns:ct="http://schemas.microsoft.com/office/2006/metadata/contentType" xmlns:ma="http://schemas.microsoft.com/office/2006/metadata/properties/metaAttributes" ct:_="" ma:_="" ma:contentTypeName="Document" ma:contentTypeID="0x01010079F111ED35F8CC479449609E8A0923A6" ma:contentTypeVersion="30" ma:contentTypeDescription="Create a new document." ma:contentTypeScope="" ma:versionID="cec0622158e8f13124e9e8fd4de31bd1">
   <xsd:schema xmlns:xsd="http://www.w3.org/2001/XMLSchema" xmlns:xs="http://www.w3.org/2001/XMLSchema" xmlns:p="http://schemas.microsoft.com/office/2006/metadata/properties" xmlns:ns1="http://schemas.microsoft.com/sharepoint/v3" xmlns:ns2="71af3243-3dd4-4a8d-8c0d-dd76da1f02a5" xmlns:ns3="16c05727-aa75-4e4a-9b5f-8a80a1165891" xmlns:ns4="230e9df3-be65-4c73-a93b-d1236ebd677e" targetNamespace="http://schemas.microsoft.com/office/2006/metadata/properties" ma:root="true" ma:fieldsID="3b52f30ab005d15df08657af532e6e38" ns1:_="" ns2:_="" ns3:_="" ns4:_="">
     <xsd:import namespace="http://schemas.microsoft.com/sharepoint/v3"/>
@@ -46497,6 +46741,26 @@
 </ct:contentTypeSchema>
 </file>
 
+<file path=customXml/item2.xml><?xml version="1.0" encoding="utf-8"?>
+<p:properties xmlns:p="http://schemas.microsoft.com/office/2006/metadata/properties" xmlns:xsi="http://www.w3.org/2001/XMLSchema-instance" xmlns:pc="http://schemas.microsoft.com/office/infopath/2007/PartnerControls">
+  <documentManagement>
+    <_ip_UnifiedCompliancePolicyUIAction xmlns="http://schemas.microsoft.com/sharepoint/v3" xsi:nil="true"/>
+    <Image xmlns="71af3243-3dd4-4a8d-8c0d-dd76da1f02a5">
+      <Url xsi:nil="true"/>
+      <Description xsi:nil="true"/>
+    </Image>
+    <Status xmlns="71af3243-3dd4-4a8d-8c0d-dd76da1f02a5">Not started</Status>
+    <Background xmlns="71af3243-3dd4-4a8d-8c0d-dd76da1f02a5">false</Background>
+    <_ip_UnifiedCompliancePolicyProperties xmlns="http://schemas.microsoft.com/sharepoint/v3" xsi:nil="true"/>
+    <ImageTagsTaxHTField xmlns="71af3243-3dd4-4a8d-8c0d-dd76da1f02a5">
+      <Terms xmlns="http://schemas.microsoft.com/office/infopath/2007/PartnerControls"/>
+    </ImageTagsTaxHTField>
+    <TaxCatchAll xmlns="230e9df3-be65-4c73-a93b-d1236ebd677e" xsi:nil="true"/>
+    <MediaServiceKeyPoints xmlns="71af3243-3dd4-4a8d-8c0d-dd76da1f02a5" xsi:nil="true"/>
+  </documentManagement>
+</p:properties>
+</file>
+
 <file path=customXml/item3.xml><?xml version="1.0" encoding="utf-8"?>
 <?mso-contentType ?>
 <FormTemplates xmlns="http://schemas.microsoft.com/sharepoint/v3/contenttype/forms">
@@ -46507,25 +46771,6 @@
 </file>
 
 <file path=customXml/itemProps1.xml><?xml version="1.0" encoding="utf-8"?>
-<ds:datastoreItem xmlns:ds="http://schemas.openxmlformats.org/officeDocument/2006/customXml" ds:itemID="{68F5451F-E621-486E-8A64-50FEB3855E59}">
-  <ds:schemaRefs>
-    <ds:schemaRef ds:uri="16c05727-aa75-4e4a-9b5f-8a80a1165891"/>
-    <ds:schemaRef ds:uri="230e9df3-be65-4c73-a93b-d1236ebd677e"/>
-    <ds:schemaRef ds:uri="71af3243-3dd4-4a8d-8c0d-dd76da1f02a5"/>
-    <ds:schemaRef ds:uri="http://purl.org/dc/dcmitype/"/>
-    <ds:schemaRef ds:uri="http://purl.org/dc/elements/1.1/"/>
-    <ds:schemaRef ds:uri="http://purl.org/dc/terms/"/>
-    <ds:schemaRef ds:uri="http://schemas.microsoft.com/office/2006/documentManagement/types"/>
-    <ds:schemaRef ds:uri="http://schemas.microsoft.com/office/2006/metadata/properties"/>
-    <ds:schemaRef ds:uri="http://schemas.microsoft.com/office/infopath/2007/PartnerControls"/>
-    <ds:schemaRef ds:uri="http://schemas.microsoft.com/sharepoint/v3"/>
-    <ds:schemaRef ds:uri="http://schemas.openxmlformats.org/package/2006/metadata/core-properties"/>
-    <ds:schemaRef ds:uri="http://www.w3.org/XML/1998/namespace"/>
-  </ds:schemaRefs>
-</ds:datastoreItem>
-</file>
-
-<file path=customXml/itemProps2.xml><?xml version="1.0" encoding="utf-8"?>
 <ds:datastoreItem xmlns:ds="http://schemas.openxmlformats.org/officeDocument/2006/customXml" ds:itemID="{278BD2F9-1572-4D37-B8FD-8AA9FD060A8C}">
   <ds:schemaRefs>
     <ds:schemaRef ds:uri="16c05727-aa75-4e4a-9b5f-8a80a1165891"/>
@@ -46546,6 +46791,25 @@
 </ds:datastoreItem>
 </file>
 
+<file path=customXml/itemProps2.xml><?xml version="1.0" encoding="utf-8"?>
+<ds:datastoreItem xmlns:ds="http://schemas.openxmlformats.org/officeDocument/2006/customXml" ds:itemID="{68F5451F-E621-486E-8A64-50FEB3855E59}">
+  <ds:schemaRefs>
+    <ds:schemaRef ds:uri="16c05727-aa75-4e4a-9b5f-8a80a1165891"/>
+    <ds:schemaRef ds:uri="230e9df3-be65-4c73-a93b-d1236ebd677e"/>
+    <ds:schemaRef ds:uri="71af3243-3dd4-4a8d-8c0d-dd76da1f02a5"/>
+    <ds:schemaRef ds:uri="http://purl.org/dc/dcmitype/"/>
+    <ds:schemaRef ds:uri="http://purl.org/dc/elements/1.1/"/>
+    <ds:schemaRef ds:uri="http://purl.org/dc/terms/"/>
+    <ds:schemaRef ds:uri="http://schemas.microsoft.com/office/2006/documentManagement/types"/>
+    <ds:schemaRef ds:uri="http://schemas.microsoft.com/office/2006/metadata/properties"/>
+    <ds:schemaRef ds:uri="http://schemas.microsoft.com/office/infopath/2007/PartnerControls"/>
+    <ds:schemaRef ds:uri="http://schemas.microsoft.com/sharepoint/v3"/>
+    <ds:schemaRef ds:uri="http://schemas.openxmlformats.org/package/2006/metadata/core-properties"/>
+    <ds:schemaRef ds:uri="http://www.w3.org/XML/1998/namespace"/>
+  </ds:schemaRefs>
+</ds:datastoreItem>
+</file>
+
 <file path=customXml/itemProps3.xml><?xml version="1.0" encoding="utf-8"?>
 <ds:datastoreItem xmlns:ds="http://schemas.openxmlformats.org/officeDocument/2006/customXml" ds:itemID="{4CC0A7E9-1715-433B-8855-F7DBB272AEE4}">
   <ds:schemaRefs>

--- a/reports/final/Rhodes - Historical Unemployment in the United States.pptx
+++ b/reports/final/Rhodes - Historical Unemployment in the United States.pptx
@@ -6799,7 +6799,7 @@
 <dgm:dataModel xmlns:dgm="http://schemas.openxmlformats.org/drawingml/2006/diagram" xmlns:a="http://schemas.openxmlformats.org/drawingml/2006/main">
   <dgm:ptLst>
     <dgm:pt modelId="{A4E2B281-2A7F-4A3F-BA79-F8BE8A44CDE2}" type="doc">
-      <dgm:prSet loTypeId="urn:microsoft.com/office/officeart/2005/8/layout/vList2" loCatId="list" qsTypeId="urn:microsoft.com/office/officeart/2005/8/quickstyle/simple1" qsCatId="simple" csTypeId="urn:microsoft.com/office/officeart/2005/8/colors/accent1_2" csCatId="accent1"/>
+      <dgm:prSet loTypeId="urn:microsoft.com/office/officeart/2005/8/layout/vList2" loCatId="list" qsTypeId="urn:microsoft.com/office/officeart/2005/8/quickstyle/simple1" qsCatId="simple" csTypeId="urn:microsoft.com/office/officeart/2005/8/colors/accent1_2" csCatId="accent1" phldr="1"/>
       <dgm:spPr/>
       <dgm:t>
         <a:bodyPr/>
@@ -6817,10 +6817,18 @@
         <a:lstStyle/>
         <a:p>
           <a:r>
-            <a:rPr lang="en-US" baseline="0"/>
-            <a:t>Professor Alraee</a:t>
+            <a:rPr lang="en-US" baseline="0" dirty="0"/>
+            <a:t>Professor </a:t>
           </a:r>
-          <a:endParaRPr lang="en-US"/>
+          <a:r>
+            <a:rPr lang="en-US" baseline="0" dirty="0" err="1"/>
+            <a:t>Alraee</a:t>
+          </a:r>
+          <a:r>
+            <a:rPr lang="en-US" baseline="0" dirty="0"/>
+            <a:t>, Professor Park, Professor Perine</a:t>
+          </a:r>
+          <a:endParaRPr lang="en-US" dirty="0"/>
         </a:p>
       </dgm:t>
     </dgm:pt>
@@ -6854,10 +6862,10 @@
         <a:lstStyle/>
         <a:p>
           <a:r>
-            <a:rPr lang="en-US" baseline="0"/>
-            <a:t>Professor Perine</a:t>
+            <a:rPr lang="en-US" baseline="0" dirty="0"/>
+            <a:t>Montgomery County Government</a:t>
           </a:r>
-          <a:endParaRPr lang="en-US"/>
+          <a:endParaRPr lang="en-US" dirty="0"/>
         </a:p>
       </dgm:t>
     </dgm:pt>
@@ -6892,9 +6900,9 @@
         <a:p>
           <a:r>
             <a:rPr lang="en-US" baseline="0"/>
-            <a:t>Professor Park</a:t>
+            <a:t>Data Montgomery</a:t>
           </a:r>
-          <a:endParaRPr lang="en-US"/>
+          <a:endParaRPr lang="en-US" dirty="0"/>
         </a:p>
       </dgm:t>
     </dgm:pt>
@@ -6928,10 +6936,10 @@
         <a:lstStyle/>
         <a:p>
           <a:r>
-            <a:rPr lang="en-US" baseline="0"/>
+            <a:rPr lang="en-US" baseline="0" dirty="0"/>
             <a:t>Class of ’26 Early College Data Science Cohort</a:t>
           </a:r>
-          <a:endParaRPr lang="en-US"/>
+          <a:endParaRPr lang="en-US" dirty="0"/>
         </a:p>
       </dgm:t>
     </dgm:pt>
@@ -10007,8 +10015,8 @@
       </dsp:nvSpPr>
       <dsp:spPr>
         <a:xfrm>
-          <a:off x="0" y="203993"/>
-          <a:ext cx="8595360" cy="719549"/>
+          <a:off x="0" y="335438"/>
+          <a:ext cx="8595360" cy="671580"/>
         </a:xfrm>
         <a:prstGeom prst="roundRect">
           <a:avLst/>
@@ -10049,12 +10057,12 @@
         </a:fontRef>
       </dsp:style>
       <dsp:txBody>
-        <a:bodyPr spcFirstLastPara="0" vert="horz" wrap="square" lIns="114300" tIns="114300" rIns="114300" bIns="114300" numCol="1" spcCol="1270" anchor="ctr" anchorCtr="0">
+        <a:bodyPr spcFirstLastPara="0" vert="horz" wrap="square" lIns="106680" tIns="106680" rIns="106680" bIns="106680" numCol="1" spcCol="1270" anchor="ctr" anchorCtr="0">
           <a:noAutofit/>
         </a:bodyPr>
         <a:lstStyle/>
         <a:p>
-          <a:pPr marL="0" lvl="0" indent="0" algn="l" defTabSz="1333500">
+          <a:pPr marL="0" lvl="0" indent="0" algn="l" defTabSz="1244600">
             <a:lnSpc>
               <a:spcPct val="90000"/>
             </a:lnSpc>
@@ -10067,15 +10075,23 @@
             <a:buNone/>
           </a:pPr>
           <a:r>
-            <a:rPr lang="en-US" sz="3000" kern="1200" baseline="0"/>
-            <a:t>Professor Alraee</a:t>
+            <a:rPr lang="en-US" sz="2800" kern="1200" baseline="0" dirty="0"/>
+            <a:t>Professor </a:t>
           </a:r>
-          <a:endParaRPr lang="en-US" sz="3000" kern="1200"/>
+          <a:r>
+            <a:rPr lang="en-US" sz="2800" kern="1200" baseline="0" dirty="0" err="1"/>
+            <a:t>Alraee</a:t>
+          </a:r>
+          <a:r>
+            <a:rPr lang="en-US" sz="2800" kern="1200" baseline="0" dirty="0"/>
+            <a:t>, Professor Park, Professor Perine</a:t>
+          </a:r>
+          <a:endParaRPr lang="en-US" sz="2800" kern="1200" dirty="0"/>
         </a:p>
       </dsp:txBody>
       <dsp:txXfrm>
-        <a:off x="35125" y="239118"/>
-        <a:ext cx="8525110" cy="649299"/>
+        <a:off x="32784" y="368222"/>
+        <a:ext cx="8529792" cy="606012"/>
       </dsp:txXfrm>
     </dsp:sp>
     <dsp:sp modelId="{16677910-B34B-4916-9B10-DE39C566FE26}">
@@ -10085,8 +10101,8 @@
       </dsp:nvSpPr>
       <dsp:spPr>
         <a:xfrm>
-          <a:off x="0" y="1009943"/>
-          <a:ext cx="8595360" cy="719549"/>
+          <a:off x="0" y="1087658"/>
+          <a:ext cx="8595360" cy="671580"/>
         </a:xfrm>
         <a:prstGeom prst="roundRect">
           <a:avLst/>
@@ -10127,12 +10143,12 @@
         </a:fontRef>
       </dsp:style>
       <dsp:txBody>
-        <a:bodyPr spcFirstLastPara="0" vert="horz" wrap="square" lIns="114300" tIns="114300" rIns="114300" bIns="114300" numCol="1" spcCol="1270" anchor="ctr" anchorCtr="0">
+        <a:bodyPr spcFirstLastPara="0" vert="horz" wrap="square" lIns="106680" tIns="106680" rIns="106680" bIns="106680" numCol="1" spcCol="1270" anchor="ctr" anchorCtr="0">
           <a:noAutofit/>
         </a:bodyPr>
         <a:lstStyle/>
         <a:p>
-          <a:pPr marL="0" lvl="0" indent="0" algn="l" defTabSz="1333500">
+          <a:pPr marL="0" lvl="0" indent="0" algn="l" defTabSz="1244600">
             <a:lnSpc>
               <a:spcPct val="90000"/>
             </a:lnSpc>
@@ -10145,15 +10161,15 @@
             <a:buNone/>
           </a:pPr>
           <a:r>
-            <a:rPr lang="en-US" sz="3000" kern="1200" baseline="0"/>
-            <a:t>Professor Perine</a:t>
+            <a:rPr lang="en-US" sz="2800" kern="1200" baseline="0" dirty="0"/>
+            <a:t>Montgomery County Government</a:t>
           </a:r>
-          <a:endParaRPr lang="en-US" sz="3000" kern="1200"/>
+          <a:endParaRPr lang="en-US" sz="2800" kern="1200" dirty="0"/>
         </a:p>
       </dsp:txBody>
       <dsp:txXfrm>
-        <a:off x="35125" y="1045068"/>
-        <a:ext cx="8525110" cy="649299"/>
+        <a:off x="32784" y="1120442"/>
+        <a:ext cx="8529792" cy="606012"/>
       </dsp:txXfrm>
     </dsp:sp>
     <dsp:sp modelId="{F6C72819-1396-4524-BB5B-94BB1839109E}">
@@ -10163,8 +10179,8 @@
       </dsp:nvSpPr>
       <dsp:spPr>
         <a:xfrm>
-          <a:off x="0" y="1815893"/>
-          <a:ext cx="8595360" cy="719549"/>
+          <a:off x="0" y="1839878"/>
+          <a:ext cx="8595360" cy="671580"/>
         </a:xfrm>
         <a:prstGeom prst="roundRect">
           <a:avLst/>
@@ -10205,12 +10221,12 @@
         </a:fontRef>
       </dsp:style>
       <dsp:txBody>
-        <a:bodyPr spcFirstLastPara="0" vert="horz" wrap="square" lIns="114300" tIns="114300" rIns="114300" bIns="114300" numCol="1" spcCol="1270" anchor="ctr" anchorCtr="0">
+        <a:bodyPr spcFirstLastPara="0" vert="horz" wrap="square" lIns="106680" tIns="106680" rIns="106680" bIns="106680" numCol="1" spcCol="1270" anchor="ctr" anchorCtr="0">
           <a:noAutofit/>
         </a:bodyPr>
         <a:lstStyle/>
         <a:p>
-          <a:pPr marL="0" lvl="0" indent="0" algn="l" defTabSz="1333500">
+          <a:pPr marL="0" lvl="0" indent="0" algn="l" defTabSz="1244600">
             <a:lnSpc>
               <a:spcPct val="90000"/>
             </a:lnSpc>
@@ -10223,15 +10239,15 @@
             <a:buNone/>
           </a:pPr>
           <a:r>
-            <a:rPr lang="en-US" sz="3000" kern="1200" baseline="0"/>
-            <a:t>Professor Park</a:t>
+            <a:rPr lang="en-US" sz="2800" kern="1200" baseline="0"/>
+            <a:t>Data Montgomery</a:t>
           </a:r>
-          <a:endParaRPr lang="en-US" sz="3000" kern="1200"/>
+          <a:endParaRPr lang="en-US" sz="2800" kern="1200" dirty="0"/>
         </a:p>
       </dsp:txBody>
       <dsp:txXfrm>
-        <a:off x="35125" y="1851018"/>
-        <a:ext cx="8525110" cy="649299"/>
+        <a:off x="32784" y="1872662"/>
+        <a:ext cx="8529792" cy="606012"/>
       </dsp:txXfrm>
     </dsp:sp>
     <dsp:sp modelId="{8065FE30-E553-42BB-AB57-425A7154F204}">
@@ -10241,8 +10257,8 @@
       </dsp:nvSpPr>
       <dsp:spPr>
         <a:xfrm>
-          <a:off x="0" y="2621843"/>
-          <a:ext cx="8595360" cy="719549"/>
+          <a:off x="0" y="2592098"/>
+          <a:ext cx="8595360" cy="671580"/>
         </a:xfrm>
         <a:prstGeom prst="roundRect">
           <a:avLst/>
@@ -10283,12 +10299,12 @@
         </a:fontRef>
       </dsp:style>
       <dsp:txBody>
-        <a:bodyPr spcFirstLastPara="0" vert="horz" wrap="square" lIns="114300" tIns="114300" rIns="114300" bIns="114300" numCol="1" spcCol="1270" anchor="ctr" anchorCtr="0">
+        <a:bodyPr spcFirstLastPara="0" vert="horz" wrap="square" lIns="106680" tIns="106680" rIns="106680" bIns="106680" numCol="1" spcCol="1270" anchor="ctr" anchorCtr="0">
           <a:noAutofit/>
         </a:bodyPr>
         <a:lstStyle/>
         <a:p>
-          <a:pPr marL="0" lvl="0" indent="0" algn="l" defTabSz="1333500">
+          <a:pPr marL="0" lvl="0" indent="0" algn="l" defTabSz="1244600">
             <a:lnSpc>
               <a:spcPct val="90000"/>
             </a:lnSpc>
@@ -10301,15 +10317,15 @@
             <a:buNone/>
           </a:pPr>
           <a:r>
-            <a:rPr lang="en-US" sz="3000" kern="1200" baseline="0"/>
+            <a:rPr lang="en-US" sz="2800" kern="1200" baseline="0" dirty="0"/>
             <a:t>Class of ’26 Early College Data Science Cohort</a:t>
           </a:r>
-          <a:endParaRPr lang="en-US" sz="3000" kern="1200"/>
+          <a:endParaRPr lang="en-US" sz="2800" kern="1200" dirty="0"/>
         </a:p>
       </dsp:txBody>
       <dsp:txXfrm>
-        <a:off x="35125" y="2656968"/>
-        <a:ext cx="8525110" cy="649299"/>
+        <a:off x="32784" y="2624882"/>
+        <a:ext cx="8529792" cy="606012"/>
       </dsp:txXfrm>
     </dsp:sp>
     <dsp:sp modelId="{92EA96B6-4875-4D2E-81A8-4833E47482D2}">
@@ -10319,8 +10335,8 @@
       </dsp:nvSpPr>
       <dsp:spPr>
         <a:xfrm>
-          <a:off x="0" y="3427793"/>
-          <a:ext cx="8595360" cy="719549"/>
+          <a:off x="0" y="3344318"/>
+          <a:ext cx="8595360" cy="671580"/>
         </a:xfrm>
         <a:prstGeom prst="roundRect">
           <a:avLst/>
@@ -10361,12 +10377,12 @@
         </a:fontRef>
       </dsp:style>
       <dsp:txBody>
-        <a:bodyPr spcFirstLastPara="0" vert="horz" wrap="square" lIns="114300" tIns="114300" rIns="114300" bIns="114300" numCol="1" spcCol="1270" anchor="ctr" anchorCtr="0">
+        <a:bodyPr spcFirstLastPara="0" vert="horz" wrap="square" lIns="106680" tIns="106680" rIns="106680" bIns="106680" numCol="1" spcCol="1270" anchor="ctr" anchorCtr="0">
           <a:noAutofit/>
         </a:bodyPr>
         <a:lstStyle/>
         <a:p>
-          <a:pPr marL="0" lvl="0" indent="0" algn="l" defTabSz="1333500">
+          <a:pPr marL="0" lvl="0" indent="0" algn="l" defTabSz="1244600">
             <a:lnSpc>
               <a:spcPct val="90000"/>
             </a:lnSpc>
@@ -10379,15 +10395,15 @@
             <a:buNone/>
           </a:pPr>
           <a:r>
-            <a:rPr lang="en-US" sz="3000" kern="1200" baseline="0"/>
+            <a:rPr lang="en-US" sz="2800" kern="1200" baseline="0"/>
             <a:t>DATA 205 Classmates</a:t>
           </a:r>
-          <a:endParaRPr lang="en-US" sz="3000" kern="1200"/>
+          <a:endParaRPr lang="en-US" sz="2800" kern="1200"/>
         </a:p>
       </dsp:txBody>
       <dsp:txXfrm>
-        <a:off x="35125" y="3462918"/>
-        <a:ext cx="8525110" cy="649299"/>
+        <a:off x="32784" y="3377102"/>
+        <a:ext cx="8529792" cy="606012"/>
       </dsp:txXfrm>
     </dsp:sp>
   </dsp:spTree>
@@ -43187,6 +43203,11 @@
           </p:cNvGraphicFramePr>
           <p:nvPr>
             <p:ph idx="1"/>
+            <p:extLst>
+              <p:ext uri="{D42A27DB-BD31-4B8C-83A1-F6EECF244321}">
+                <p14:modId xmlns:p14="http://schemas.microsoft.com/office/powerpoint/2010/main" val="1902607130"/>
+              </p:ext>
+            </p:extLst>
           </p:nvPr>
         </p:nvGraphicFramePr>
         <p:xfrm>
@@ -44804,10 +44825,10 @@
       </p:sp>
       <p:pic>
         <p:nvPicPr>
-          <p:cNvPr id="9" name="Picture 8">
+          <p:cNvPr id="11" name="Picture 10">
             <a:extLst>
               <a:ext uri="{FF2B5EF4-FFF2-40B4-BE49-F238E27FC236}">
-                <a16:creationId xmlns:a16="http://schemas.microsoft.com/office/drawing/2014/main" id="{5F33A8B1-B945-57BC-80BA-A1B76004A725}"/>
+                <a16:creationId xmlns:a16="http://schemas.microsoft.com/office/drawing/2014/main" id="{46225ACA-528C-125F-EFC3-5477E247BB23}"/>
               </a:ext>
             </a:extLst>
           </p:cNvPr>
@@ -44824,38 +44845,8 @@
         </p:blipFill>
         <p:spPr>
           <a:xfrm>
-            <a:off x="259397" y="3260438"/>
-            <a:ext cx="5836604" cy="3597562"/>
-          </a:xfrm>
-          <a:prstGeom prst="rect">
-            <a:avLst/>
-          </a:prstGeom>
-        </p:spPr>
-      </p:pic>
-      <p:pic>
-        <p:nvPicPr>
-          <p:cNvPr id="11" name="Picture 10">
-            <a:extLst>
-              <a:ext uri="{FF2B5EF4-FFF2-40B4-BE49-F238E27FC236}">
-                <a16:creationId xmlns:a16="http://schemas.microsoft.com/office/drawing/2014/main" id="{46225ACA-528C-125F-EFC3-5477E247BB23}"/>
-              </a:ext>
-            </a:extLst>
-          </p:cNvPr>
-          <p:cNvPicPr>
-            <a:picLocks noChangeAspect="1"/>
-          </p:cNvPicPr>
-          <p:nvPr/>
-        </p:nvPicPr>
-        <p:blipFill>
-          <a:blip r:embed="rId3"/>
-          <a:stretch>
-            <a:fillRect/>
-          </a:stretch>
-        </p:blipFill>
-        <p:spPr>
-          <a:xfrm>
-            <a:off x="5603132" y="90201"/>
-            <a:ext cx="5657862" cy="3487389"/>
+            <a:off x="1821707" y="1899951"/>
+            <a:ext cx="7484218" cy="4613117"/>
           </a:xfrm>
           <a:prstGeom prst="rect">
             <a:avLst/>
